--- a/templates/posts/october/01-10-2026-thu-li-boubacar-option-e-green-roots.pptx
+++ b/templates/posts/october/01-10-2026-thu-li-boubacar-option-e-green-roots.pptx
@@ -502,7 +502,7 @@
           <a:lstStyle/>
           <a:p>
             <a:r>
-              <a:t>Option E, green roots (style of the SFW 'Welcome Eric Feiler' card). Fonts: Roboto and Times New Roman, as on that card. Photo: assets/photo/boubacar/boubacar-portrait-bananas.jpg in an arch frame. Root network: assets/collage/root-network-green.png, drawn by code. Call to action: his YouTube channel (his Instagram @tidia.diallo.1 is private). Sources: Impact story sheet, Boubacar Tidiane Diallo: https://docs.google.com/spreadsheets/d/10UHLwzJLBQAsmJqmg4hiCQRjBKXPAx7UnOudU-Vsg5U/edit; Email from Boubacar to Allison, 30 September 2026; Instagram: https://www.instagram.com/tidia.diallo.1/; YouTube: https://www.youtube.com/@boubacartidianediallo; Facebook: https://www.facebook.com/btidja; Photos: sent by Boubacar to Stephanie on WhatsApp, 17 August 2026, and to Allison, September 2026. [TAG @Stephanie] Send Boubacar the final caption and slides to approve before posting, and confirm he studied on a scholarship.</a:t>
+              <a:t>Option E, green roots (style of the SFW 'Welcome Eric Feiler' card). Fonts: Montserrat and EB Garamond (brand). Photo: assets/photo/boubacar/boubacar-portrait-bananas.jpg in an arch frame. Root network: assets/collage/root-network-green.png, drawn by code. Call to action: his YouTube channel (his Instagram @tidia.diallo.1 is private). Sources: Impact story sheet, Boubacar Tidiane Diallo: https://docs.google.com/spreadsheets/d/10UHLwzJLBQAsmJqmg4hiCQRjBKXPAx7UnOudU-Vsg5U/edit; Email from Boubacar to Allison, 30 September 2026; Instagram: https://www.instagram.com/tidia.diallo.1/; YouTube: https://www.youtube.com/@boubacartidianediallo; Facebook: https://www.facebook.com/btidja; Photos: sent by Boubacar to Stephanie on WhatsApp, 17 August 2026, and to Allison, September 2026. [TAG @Stephanie] Send Boubacar the final caption and slides to approve before posting, and confirm he studied on a scholarship.</a:t>
             </a:r>
           </a:p>
         </p:txBody>
@@ -3685,7 +3685,7 @@
       </p:sp>
       <p:pic>
         <p:nvPicPr>
-          <p:cNvPr id="6" name="Picture 5" descr="3863734254881739869.jpg"/>
+          <p:cNvPr id="6" name="Picture 5" descr="8840858513894694492.jpg"/>
           <p:cNvPicPr>
             <a:picLocks noChangeAspect="1"/>
           </p:cNvPicPr>
@@ -3809,7 +3809,7 @@
                 <a:solidFill>
                   <a:srgbClr val="DBE6A7"/>
                 </a:solidFill>
-                <a:latin typeface="Roboto"/>
+                <a:latin typeface="Montserrat"/>
               </a:rPr>
               <a:t>Happy International Coffee Day</a:t>
             </a:r>
@@ -3844,11 +3844,11 @@
               </a:lnSpc>
             </a:pPr>
             <a:r>
-              <a:rPr sz="5800" b="0" i="0">
+              <a:rPr sz="5200" b="0" i="0">
                 <a:solidFill>
                   <a:srgbClr val="F4F1EA"/>
                 </a:solidFill>
-                <a:latin typeface="Roboto"/>
+                <a:latin typeface="Montserrat"/>
               </a:rPr>
               <a:t>Boubacar Tidiane</a:t>
             </a:r>
@@ -3860,11 +3860,11 @@
               </a:lnSpc>
             </a:pPr>
             <a:r>
-              <a:rPr sz="5800" b="0" i="0">
+              <a:rPr sz="5200" b="0" i="0">
                 <a:solidFill>
                   <a:srgbClr val="F4F1EA"/>
                 </a:solidFill>
-                <a:latin typeface="Roboto"/>
+                <a:latin typeface="Montserrat"/>
               </a:rPr>
               <a:t>Diallo</a:t>
             </a:r>
@@ -3903,7 +3903,7 @@
                 <a:solidFill>
                   <a:srgbClr val="22371F"/>
                 </a:solidFill>
-                <a:latin typeface="Times New Roman"/>
+                <a:latin typeface="EB Garamond"/>
               </a:rPr>
               <a:t>Gnaly Coffee &amp; AgroÉcole Bio</a:t>
             </a:r>
@@ -3919,7 +3919,7 @@
                 <a:solidFill>
                   <a:srgbClr val="22371F"/>
                 </a:solidFill>
-                <a:latin typeface="Times New Roman"/>
+                <a:latin typeface="EB Garamond"/>
               </a:rPr>
               <a:t>Fouta Djallon, Guinea-Conakry</a:t>
             </a:r>
